--- a/docs/presentaciones/parts/parte-4-mlops-completa.pptx
+++ b/docs/presentaciones/parts/parte-4-mlops-completa.pptx
@@ -5403,7 +5403,7 @@
                 </a:solidFill>
                 <a:latin typeface="Segoe UI"/>
               </a:rPr>
-              <a:t>Parte: 4 — MLOps · Fuente: Huyen cap. 6 + Feast docs 0.40+.  Duración estimada: 70 min.</a:t>
+              <a:t>Parte: 4 — MLOps · Fuente: Huyen cap. 6 + Feast docs 0.40+.  Duración estimada: 70 min. · Nivel: Avanzado</a:t>
             </a:r>
           </a:p>
         </p:txBody>
@@ -7627,7 +7627,7 @@
                 </a:solidFill>
                 <a:latin typeface="Segoe UI"/>
               </a:rPr>
-              <a:t>Parte: 4 — MLOps · Fuente: Huyen cap. 10 + docs GitHub Actions + CML.dev.  Duración estimada: 80 min.</a:t>
+              <a:t>Parte: 4 — MLOps · Fuente: Huyen cap. 10 + docs GitHub Actions + CML.dev.  Duración estimada: 80 min. · Nivel: Avanzado</a:t>
             </a:r>
           </a:p>
         </p:txBody>
@@ -10575,7 +10575,7 @@
                 </a:solidFill>
                 <a:latin typeface="Segoe UI"/>
               </a:rPr>
-              <a:t>Parte: 4 — MLOps · Fuente: Huyen cap. 11 + docs Docker + Nilsson, Docker Deep Dive.  Duración estimada: 75 min.</a:t>
+              <a:t>Parte: 4 — MLOps · Fuente: Huyen cap. 11 + docs Docker + Nilsson, Docker Deep Dive.  Duración estimada: 75 min. · Nivel: Avanzado</a:t>
             </a:r>
           </a:p>
         </p:txBody>
@@ -12856,7 +12856,7 @@
                 </a:solidFill>
                 <a:latin typeface="Segoe UI"/>
               </a:rPr>
-              <a:t>Parte: 4 — MLOps · Fuente: Huyen cap. 11 + docs FastAPI + Ramalho cap. 5.  Duración estimada: 80 min.</a:t>
+              <a:t>Parte: 4 — MLOps · Fuente: Huyen cap. 11 + docs FastAPI + Ramalho cap. 5.  Duración estimada: 80 min. · Nivel: Avanzado</a:t>
             </a:r>
           </a:p>
         </p:txBody>
@@ -15273,7 +15273,7 @@
                 </a:solidFill>
                 <a:latin typeface="Segoe UI"/>
               </a:rPr>
-              <a:t>Parte: 4 — MLOps · Fuente: Huyen cap. 11 + Burns et al., Kubernetes: Up and Running (3ª ed.) + docs k8s.  Duración estimada: 90 min.</a:t>
+              <a:t>Parte: 4 — MLOps · Fuente: Huyen cap. 11 + Burns et al., Kubernetes: Up and Running (3ª ed.) + docs k8s.  Duración estimada: 90 min. · Nivel: Avanzado</a:t>
             </a:r>
           </a:p>
         </p:txBody>
@@ -16225,7 +16225,7 @@
                 </a:solidFill>
                 <a:latin typeface="Segoe UI"/>
               </a:rPr>
-              <a:t>Notebook declarativo: genera los 5 manifests YAML mínimos para desplegar el iris-api en K8s. Para verlos en vivo: `bash kind create cluster --name ml</a:t>
+              <a:t>Antes de entrar a los YAML, quedate con la imagen mental de qué es Kubernetes: &gt; Kubernetes es un orquestador que mantiene N réplicas de tu servicio vivas y balancea la carga entre ellas — como el director de una orquesta que, si un músico falla a mitad de la obra, hace entrar al suplente sin que el público lo note. De ahí salen todos los objetos que verás:</a:t>
             </a:r>
           </a:p>
         </p:txBody>
@@ -17421,7 +17421,7 @@
                 </a:solidFill>
                 <a:latin typeface="Segoe UI"/>
               </a:rPr>
-              <a:t>Parte: 4 — MLOps · Fuente: Huyen cap. 11 + docs Lambda container images + Cloud Functions 2nd gen.  Duración estimada: 75 min.</a:t>
+              <a:t>Parte: 4 — MLOps · Fuente: Huyen cap. 11 + docs Lambda container images + Cloud Functions 2nd gen.  Duración estimada: 75 min. · Nivel: Avanzado</a:t>
             </a:r>
           </a:p>
         </p:txBody>
@@ -17973,7 +17973,7 @@
                 </a:solidFill>
                 <a:latin typeface="Segoe UI"/>
               </a:rPr>
-              <a:t>Parte: 4 — MLOps · Fuente: Huyen, Designing Machine Learning Systems cap. 6 + docs oficiales DVC 3.x.  Duración estimada: 75 min.</a:t>
+              <a:t>Parte: 4 — MLOps · Fuente: Huyen, Designing Machine Learning Systems cap. 6 + docs oficiales DVC 3.x.  Duración estimada: 75 min. · Nivel: Avanzado</a:t>
             </a:r>
           </a:p>
         </p:txBody>
@@ -20216,7 +20216,7 @@
                 </a:solidFill>
                 <a:latin typeface="Segoe UI"/>
               </a:rPr>
-              <a:t>Parte: 4 — MLOps · Fuente: Huyen cap. 8 + Evidently AI docs + NannyML + Gama et al., A Survey on Concept Drift Adaptation (ACM, 2014).  Duración estimada: 80 min.</a:t>
+              <a:t>Parte: 4 — MLOps · Fuente: Huyen cap. 8 + Evidently AI docs + NannyML + Gama et al., A Survey on Concept Drift Adaptation (ACM, 2014).  Duración estimada: 80 min. · Nivel: Avanzado</a:t>
             </a:r>
           </a:p>
         </p:txBody>
@@ -22535,7 +22535,7 @@
                 </a:solidFill>
                 <a:latin typeface="Segoe UI"/>
               </a:rPr>
-              <a:t>Parte: 4 — MLOps · Fuente: Huyen cap. 9 + Airflow docs + Prefect docs.  Duración estimada: 75 min.</a:t>
+              <a:t>Parte: 4 — MLOps · Fuente: Huyen cap. 9 + Airflow docs + Prefect docs.  Duración estimada: 75 min. · Nivel: Avanzado</a:t>
             </a:r>
           </a:p>
         </p:txBody>
@@ -25121,7 +25121,7 @@
                 </a:solidFill>
                 <a:latin typeface="Segoe UI"/>
               </a:rPr>
-              <a:t>Parte: 4 — MLOps · Fuente: Huyen cap. 11 + Fowler, Continuous Delivery + Istio traffic management.  Duración estimada: 75 min.</a:t>
+              <a:t>Parte: 4 — MLOps · Fuente: Huyen cap. 11 + Fowler, Continuous Delivery + Istio traffic management.  Duración estimada: 75 min. · Nivel: Avanzado</a:t>
             </a:r>
           </a:p>
         </p:txBody>
@@ -27421,7 +27421,7 @@
                 </a:solidFill>
                 <a:latin typeface="Segoe UI"/>
               </a:rPr>
-              <a:t>Parte: 4 — MLOps · Fuente: Molnar, Interpretable ML (2ª ed.) + Lundberg &amp; Lee (2017, NIPS, SHAP paper) + Ribeiro et al. (2016, KDD, LIME paper).  Duración estimada: 80 min. · Esta clase es complementaria a la Clase 079 (SHAP profundo, Parte 1). Acá el foco es producción: cómo integrar interpretabilidad al servicio (/explain endpoint), cómo escalar SHAP a grandes datasets, y cómo presentar explicaciones a stakeholders no técnicos.</a:t>
+              <a:t>Parte: 4 — MLOps · Fuente: Molnar, Interpretable ML (2ª ed.) + Lundberg &amp; Lee (2017, NIPS, SHAP paper) + Ribeiro et al. (2016, KDD, LIME paper).  Duración estimada: 80 min. · Nivel: Avanzado · Esta clase es complementaria a la Clase 079 (SHAP profundo, Parte 1). Acá el foco es producción: cómo integrar interpretabilidad al servicio (/explain endpoint), cómo escalar SHAP a grandes datasets, y cómo presentar explicaciones a stakeholders no técnicos.</a:t>
             </a:r>
           </a:p>
         </p:txBody>
@@ -30141,7 +30141,7 @@
                 </a:solidFill>
                 <a:latin typeface="Segoe UI"/>
               </a:rPr>
-              <a:t>Parte: 4 — MLOps · Fuente: Huyen cap. 4 + Great Expectations docs (1.x) + Deequ paper.  Duración estimada: 75 min.</a:t>
+              <a:t>Parte: 4 — MLOps · Fuente: Huyen cap. 4 + Great Expectations docs (1.x) + Deequ paper.  Duración estimada: 75 min. · Nivel: Avanzado</a:t>
             </a:r>
           </a:p>
         </p:txBody>
@@ -32289,7 +32289,7 @@
                 </a:solidFill>
                 <a:latin typeface="Segoe UI"/>
               </a:rPr>
-              <a:t>Parte: 4 — MLOps · Fuente: Ribeiro et al., Beyond Accuracy: Behavioral Testing of NLP Models with CheckList (ACL 2020, best paper) + Huyen cap. 9 + Deepchecks docs.  Duración estimada: 80 min.</a:t>
+              <a:t>Parte: 4 — MLOps · Fuente: Ribeiro et al., Beyond Accuracy: Behavioral Testing of NLP Models with CheckList (ACL 2020, best paper) + Huyen cap. 9 + Deepchecks docs.  Duración estimada: 80 min. · Nivel: Avanzado</a:t>
             </a:r>
           </a:p>
         </p:txBody>
@@ -35554,7 +35554,7 @@
                 </a:solidFill>
                 <a:latin typeface="Segoe UI"/>
               </a:rPr>
-              <a:t>Parte: 4 — MLOps · Fuente: Huyen, Designing Machine Learning Systems cap. 6 + 11 + docs MLflow 2.x.  Duración estimada: 75 min.</a:t>
+              <a:t>Parte: 4 — MLOps · Fuente: Huyen, Designing Machine Learning Systems cap. 6 + 11 + docs MLflow 2.x.  Duración estimada: 75 min. · Nivel: Avanzado</a:t>
             </a:r>
           </a:p>
         </p:txBody>
